--- a/p04/A-frame-moving-geometric-objects.pptx
+++ b/p04/A-frame-moving-geometric-objects.pptx
@@ -5,7 +5,7 @@
     <p:sldMasterId id="2147483660" r:id="rId1"/>
   </p:sldMasterIdLst>
   <p:notesMasterIdLst>
-    <p:notesMasterId r:id="rId21"/>
+    <p:notesMasterId r:id="rId22"/>
   </p:notesMasterIdLst>
   <p:sldIdLst>
     <p:sldId id="297" r:id="rId2"/>
@@ -23,10 +23,11 @@
     <p:sldId id="301" r:id="rId14"/>
     <p:sldId id="302" r:id="rId15"/>
     <p:sldId id="288" r:id="rId16"/>
-    <p:sldId id="287" r:id="rId17"/>
-    <p:sldId id="299" r:id="rId18"/>
-    <p:sldId id="284" r:id="rId19"/>
-    <p:sldId id="293" r:id="rId20"/>
+    <p:sldId id="303" r:id="rId17"/>
+    <p:sldId id="287" r:id="rId18"/>
+    <p:sldId id="299" r:id="rId19"/>
+    <p:sldId id="284" r:id="rId20"/>
+    <p:sldId id="293" r:id="rId21"/>
   </p:sldIdLst>
   <p:sldSz cx="12192000" cy="6858000"/>
   <p:notesSz cx="7019925" cy="9305925"/>
@@ -223,7 +224,7 @@
           <a:p>
             <a:fld id="{FA1E3CD0-6E24-4AC0-945A-82AEC1490673}" type="datetimeFigureOut">
               <a:rPr lang="en-US" smtClean="0"/>
-              <a:t>10/30/2025</a:t>
+              <a:t>1/6/2026</a:t>
             </a:fld>
             <a:endParaRPr lang="en-US"/>
           </a:p>
@@ -705,7 +706,7 @@
           <a:p>
             <a:fld id="{846CE7D5-CF57-46EF-B807-FDD0502418D4}" type="datetimeFigureOut">
               <a:rPr lang="en-US" smtClean="0"/>
-              <a:t>10/30/2025</a:t>
+              <a:t>1/6/2026</a:t>
             </a:fld>
             <a:endParaRPr lang="en-US"/>
           </a:p>
@@ -875,7 +876,7 @@
           <a:p>
             <a:fld id="{846CE7D5-CF57-46EF-B807-FDD0502418D4}" type="datetimeFigureOut">
               <a:rPr lang="en-US" smtClean="0"/>
-              <a:t>10/30/2025</a:t>
+              <a:t>1/6/2026</a:t>
             </a:fld>
             <a:endParaRPr lang="en-US"/>
           </a:p>
@@ -1055,7 +1056,7 @@
           <a:p>
             <a:fld id="{846CE7D5-CF57-46EF-B807-FDD0502418D4}" type="datetimeFigureOut">
               <a:rPr lang="en-US" smtClean="0"/>
-              <a:t>10/30/2025</a:t>
+              <a:t>1/6/2026</a:t>
             </a:fld>
             <a:endParaRPr lang="en-US"/>
           </a:p>
@@ -1225,7 +1226,7 @@
           <a:p>
             <a:fld id="{846CE7D5-CF57-46EF-B807-FDD0502418D4}" type="datetimeFigureOut">
               <a:rPr lang="en-US" smtClean="0"/>
-              <a:t>10/30/2025</a:t>
+              <a:t>1/6/2026</a:t>
             </a:fld>
             <a:endParaRPr lang="en-US"/>
           </a:p>
@@ -1471,7 +1472,7 @@
           <a:p>
             <a:fld id="{846CE7D5-CF57-46EF-B807-FDD0502418D4}" type="datetimeFigureOut">
               <a:rPr lang="en-US" smtClean="0"/>
-              <a:t>10/30/2025</a:t>
+              <a:t>1/6/2026</a:t>
             </a:fld>
             <a:endParaRPr lang="en-US"/>
           </a:p>
@@ -1703,7 +1704,7 @@
           <a:p>
             <a:fld id="{846CE7D5-CF57-46EF-B807-FDD0502418D4}" type="datetimeFigureOut">
               <a:rPr lang="en-US" smtClean="0"/>
-              <a:t>10/30/2025</a:t>
+              <a:t>1/6/2026</a:t>
             </a:fld>
             <a:endParaRPr lang="en-US"/>
           </a:p>
@@ -2070,7 +2071,7 @@
           <a:p>
             <a:fld id="{846CE7D5-CF57-46EF-B807-FDD0502418D4}" type="datetimeFigureOut">
               <a:rPr lang="en-US" smtClean="0"/>
-              <a:t>10/30/2025</a:t>
+              <a:t>1/6/2026</a:t>
             </a:fld>
             <a:endParaRPr lang="en-US"/>
           </a:p>
@@ -2188,7 +2189,7 @@
           <a:p>
             <a:fld id="{846CE7D5-CF57-46EF-B807-FDD0502418D4}" type="datetimeFigureOut">
               <a:rPr lang="en-US" smtClean="0"/>
-              <a:t>10/30/2025</a:t>
+              <a:t>1/6/2026</a:t>
             </a:fld>
             <a:endParaRPr lang="en-US"/>
           </a:p>
@@ -2283,7 +2284,7 @@
           <a:p>
             <a:fld id="{846CE7D5-CF57-46EF-B807-FDD0502418D4}" type="datetimeFigureOut">
               <a:rPr lang="en-US" smtClean="0"/>
-              <a:t>10/30/2025</a:t>
+              <a:t>1/6/2026</a:t>
             </a:fld>
             <a:endParaRPr lang="en-US"/>
           </a:p>
@@ -2560,7 +2561,7 @@
           <a:p>
             <a:fld id="{846CE7D5-CF57-46EF-B807-FDD0502418D4}" type="datetimeFigureOut">
               <a:rPr lang="en-US" smtClean="0"/>
-              <a:t>10/30/2025</a:t>
+              <a:t>1/6/2026</a:t>
             </a:fld>
             <a:endParaRPr lang="en-US"/>
           </a:p>
@@ -2817,7 +2818,7 @@
           <a:p>
             <a:fld id="{846CE7D5-CF57-46EF-B807-FDD0502418D4}" type="datetimeFigureOut">
               <a:rPr lang="en-US" smtClean="0"/>
-              <a:t>10/30/2025</a:t>
+              <a:t>1/6/2026</a:t>
             </a:fld>
             <a:endParaRPr lang="en-US"/>
           </a:p>
@@ -3030,7 +3031,7 @@
           <a:p>
             <a:fld id="{846CE7D5-CF57-46EF-B807-FDD0502418D4}" type="datetimeFigureOut">
               <a:rPr lang="en-US" smtClean="0"/>
-              <a:t>10/30/2025</a:t>
+              <a:t>1/6/2026</a:t>
             </a:fld>
             <a:endParaRPr lang="en-US"/>
           </a:p>
@@ -6229,8 +6230,8 @@
           </a:p>
         </p:txBody>
       </p:sp>
-      <mc:AlternateContent xmlns:mc="http://schemas.openxmlformats.org/markup-compatibility/2006">
-        <mc:Choice xmlns:a14="http://schemas.microsoft.com/office/drawing/2010/main" Requires="a14">
+      <mc:AlternateContent xmlns:mc="http://schemas.openxmlformats.org/markup-compatibility/2006" xmlns:a14="http://schemas.microsoft.com/office/drawing/2010/main">
+        <mc:Choice Requires="a14">
           <p:sp>
             <p:nvSpPr>
               <p:cNvPr id="13" name="TextBox 12">
@@ -6259,6 +6260,7 @@
               </a:bodyPr>
               <a:lstStyle/>
               <a:p>
+                <a:pPr/>
                 <a14:m>
                   <m:oMathPara xmlns:m="http://schemas.openxmlformats.org/officeDocument/2006/math">
                     <m:oMathParaPr>
@@ -6298,11 +6300,12 @@
                     </m:oMath>
                   </m:oMathPara>
                 </a14:m>
+                <a:endParaRPr/>
               </a:p>
             </p:txBody>
           </p:sp>
         </mc:Choice>
-        <mc:Fallback>
+        <mc:Fallback xmlns="">
           <p:sp>
             <p:nvSpPr>
               <p:cNvPr id="13" name="TextBox 12">
@@ -6347,8 +6350,8 @@
           </p:sp>
         </mc:Fallback>
       </mc:AlternateContent>
-      <mc:AlternateContent xmlns:mc="http://schemas.openxmlformats.org/markup-compatibility/2006">
-        <mc:Choice xmlns:a14="http://schemas.microsoft.com/office/drawing/2010/main" Requires="a14">
+      <mc:AlternateContent xmlns:mc="http://schemas.openxmlformats.org/markup-compatibility/2006" xmlns:a14="http://schemas.microsoft.com/office/drawing/2010/main">
+        <mc:Choice Requires="a14">
           <p:sp>
             <p:nvSpPr>
               <p:cNvPr id="14" name="TextBox 13">
@@ -6377,6 +6380,7 @@
               </a:bodyPr>
               <a:lstStyle/>
               <a:p>
+                <a:pPr/>
                 <a14:m>
                   <m:oMathPara xmlns:m="http://schemas.openxmlformats.org/officeDocument/2006/math">
                     <m:oMathParaPr>
@@ -6392,11 +6396,12 @@
                     </m:oMath>
                   </m:oMathPara>
                 </a14:m>
+                <a:endParaRPr/>
               </a:p>
             </p:txBody>
           </p:sp>
         </mc:Choice>
-        <mc:Fallback>
+        <mc:Fallback xmlns="">
           <p:sp>
             <p:nvSpPr>
               <p:cNvPr id="14" name="TextBox 13">
@@ -6441,8 +6446,8 @@
           </p:sp>
         </mc:Fallback>
       </mc:AlternateContent>
-      <mc:AlternateContent xmlns:mc="http://schemas.openxmlformats.org/markup-compatibility/2006">
-        <mc:Choice xmlns:a14="http://schemas.microsoft.com/office/drawing/2010/main" Requires="a14">
+      <mc:AlternateContent xmlns:mc="http://schemas.openxmlformats.org/markup-compatibility/2006" xmlns:a14="http://schemas.microsoft.com/office/drawing/2010/main">
+        <mc:Choice Requires="a14">
           <p:sp>
             <p:nvSpPr>
               <p:cNvPr id="15" name="TextBox 14">
@@ -6471,6 +6476,7 @@
               </a:bodyPr>
               <a:lstStyle/>
               <a:p>
+                <a:pPr/>
                 <a14:m>
                   <m:oMathPara xmlns:m="http://schemas.openxmlformats.org/officeDocument/2006/math">
                     <m:oMathParaPr>
@@ -6597,7 +6603,7 @@
             </p:txBody>
           </p:sp>
         </mc:Choice>
-        <mc:Fallback>
+        <mc:Fallback xmlns="">
           <p:sp>
             <p:nvSpPr>
               <p:cNvPr id="15" name="TextBox 14">
@@ -6642,8 +6648,8 @@
           </p:sp>
         </mc:Fallback>
       </mc:AlternateContent>
-      <mc:AlternateContent xmlns:mc="http://schemas.openxmlformats.org/markup-compatibility/2006">
-        <mc:Choice xmlns:a14="http://schemas.microsoft.com/office/drawing/2010/main" Requires="a14">
+      <mc:AlternateContent xmlns:mc="http://schemas.openxmlformats.org/markup-compatibility/2006" xmlns:a14="http://schemas.microsoft.com/office/drawing/2010/main">
+        <mc:Choice Requires="a14">
           <p:sp>
             <p:nvSpPr>
               <p:cNvPr id="16" name="TextBox 15">
@@ -6672,6 +6678,7 @@
               </a:bodyPr>
               <a:lstStyle/>
               <a:p>
+                <a:pPr/>
                 <a14:m>
                   <m:oMathPara xmlns:m="http://schemas.openxmlformats.org/officeDocument/2006/math">
                     <m:oMathParaPr>
@@ -6760,7 +6767,7 @@
             </p:txBody>
           </p:sp>
         </mc:Choice>
-        <mc:Fallback>
+        <mc:Fallback xmlns="">
           <p:sp>
             <p:nvSpPr>
               <p:cNvPr id="16" name="TextBox 15">
@@ -6869,8 +6876,8 @@
           </a:p>
         </p:txBody>
       </p:sp>
-      <mc:AlternateContent xmlns:mc="http://schemas.openxmlformats.org/markup-compatibility/2006">
-        <mc:Choice xmlns:a14="http://schemas.microsoft.com/office/drawing/2010/main" Requires="a14">
+      <mc:AlternateContent xmlns:mc="http://schemas.openxmlformats.org/markup-compatibility/2006" xmlns:a14="http://schemas.microsoft.com/office/drawing/2010/main">
+        <mc:Choice Requires="a14">
           <p:sp>
             <p:nvSpPr>
               <p:cNvPr id="15" name="TextBox 14">
@@ -6899,6 +6906,7 @@
               </a:bodyPr>
               <a:lstStyle/>
               <a:p>
+                <a:pPr/>
                 <a14:m>
                   <m:oMathPara xmlns:m="http://schemas.openxmlformats.org/officeDocument/2006/math">
                     <m:oMathParaPr>
@@ -7025,7 +7033,7 @@
             </p:txBody>
           </p:sp>
         </mc:Choice>
-        <mc:Fallback>
+        <mc:Fallback xmlns="">
           <p:sp>
             <p:nvSpPr>
               <p:cNvPr id="15" name="TextBox 14">
@@ -7070,8 +7078,8 @@
           </p:sp>
         </mc:Fallback>
       </mc:AlternateContent>
-      <mc:AlternateContent xmlns:mc="http://schemas.openxmlformats.org/markup-compatibility/2006">
-        <mc:Choice xmlns:a14="http://schemas.microsoft.com/office/drawing/2010/main" Requires="a14">
+      <mc:AlternateContent xmlns:mc="http://schemas.openxmlformats.org/markup-compatibility/2006" xmlns:a14="http://schemas.microsoft.com/office/drawing/2010/main">
+        <mc:Choice Requires="a14">
           <p:sp>
             <p:nvSpPr>
               <p:cNvPr id="16" name="TextBox 15">
@@ -7100,6 +7108,7 @@
               </a:bodyPr>
               <a:lstStyle/>
               <a:p>
+                <a:pPr/>
                 <a14:m>
                   <m:oMathPara xmlns:m="http://schemas.openxmlformats.org/officeDocument/2006/math">
                     <m:oMathParaPr>
@@ -7188,7 +7197,7 @@
             </p:txBody>
           </p:sp>
         </mc:Choice>
-        <mc:Fallback>
+        <mc:Fallback xmlns="">
           <p:sp>
             <p:nvSpPr>
               <p:cNvPr id="16" name="TextBox 15">
@@ -7233,8 +7242,8 @@
           </p:sp>
         </mc:Fallback>
       </mc:AlternateContent>
-      <mc:AlternateContent xmlns:mc="http://schemas.openxmlformats.org/markup-compatibility/2006">
-        <mc:Choice xmlns:a14="http://schemas.microsoft.com/office/drawing/2010/main" Requires="a14">
+      <mc:AlternateContent xmlns:mc="http://schemas.openxmlformats.org/markup-compatibility/2006" xmlns:a14="http://schemas.microsoft.com/office/drawing/2010/main">
+        <mc:Choice Requires="a14">
           <p:sp>
             <p:nvSpPr>
               <p:cNvPr id="21" name="TextBox 20">
@@ -7263,6 +7272,7 @@
               </a:bodyPr>
               <a:lstStyle/>
               <a:p>
+                <a:pPr/>
                 <a14:m>
                   <m:oMathPara xmlns:m="http://schemas.openxmlformats.org/officeDocument/2006/math">
                     <m:oMathParaPr>
@@ -7314,7 +7324,7 @@
             </p:txBody>
           </p:sp>
         </mc:Choice>
-        <mc:Fallback>
+        <mc:Fallback xmlns="">
           <p:sp>
             <p:nvSpPr>
               <p:cNvPr id="21" name="TextBox 20">
@@ -7452,8 +7462,8 @@
             </a:fontRef>
           </p:style>
         </p:cxnSp>
-        <mc:AlternateContent xmlns:mc="http://schemas.openxmlformats.org/markup-compatibility/2006">
-          <mc:Choice xmlns:a14="http://schemas.microsoft.com/office/drawing/2010/main" Requires="a14">
+        <mc:AlternateContent xmlns:mc="http://schemas.openxmlformats.org/markup-compatibility/2006" xmlns:a14="http://schemas.microsoft.com/office/drawing/2010/main">
+          <mc:Choice Requires="a14">
             <p:sp>
               <p:nvSpPr>
                 <p:cNvPr id="34" name="TextBox 33">
@@ -7482,6 +7492,7 @@
                 </a:bodyPr>
                 <a:lstStyle/>
                 <a:p>
+                  <a:pPr/>
                   <a14:m>
                     <m:oMathPara xmlns:m="http://schemas.openxmlformats.org/officeDocument/2006/math">
                       <m:oMathParaPr>
@@ -7503,11 +7514,12 @@
                       </m:oMath>
                     </m:oMathPara>
                   </a14:m>
+                  <a:endParaRPr/>
                 </a:p>
               </p:txBody>
             </p:sp>
           </mc:Choice>
-          <mc:Fallback>
+          <mc:Fallback xmlns="">
             <p:sp>
               <p:nvSpPr>
                 <p:cNvPr id="34" name="TextBox 33">
@@ -7971,6 +7983,45 @@
           </a:p>
         </p:txBody>
       </p:sp>
+      <p:sp>
+        <p:nvSpPr>
+          <p:cNvPr id="6" name="TextBox 5">
+            <a:extLst>
+              <a:ext uri="{FF2B5EF4-FFF2-40B4-BE49-F238E27FC236}">
+                <a16:creationId xmlns:a16="http://schemas.microsoft.com/office/drawing/2014/main" id="{EA615800-B83A-5D56-0091-8016BB92E2BE}"/>
+              </a:ext>
+            </a:extLst>
+          </p:cNvPr>
+          <p:cNvSpPr txBox="1"/>
+          <p:nvPr/>
+        </p:nvSpPr>
+        <p:spPr>
+          <a:xfrm>
+            <a:off x="2223752" y="6113172"/>
+            <a:ext cx="3705310" cy="461665"/>
+          </a:xfrm>
+          <a:prstGeom prst="rect">
+            <a:avLst/>
+          </a:prstGeom>
+          <a:noFill/>
+        </p:spPr>
+        <p:txBody>
+          <a:bodyPr wrap="none" rtlCol="0">
+            <a:spAutoFit/>
+          </a:bodyPr>
+          <a:lstStyle/>
+          <a:p>
+            <a:r>
+              <a:rPr lang="en-US" sz="2400" b="1" dirty="0">
+                <a:solidFill>
+                  <a:srgbClr val="FF0000"/>
+                </a:solidFill>
+              </a:rPr>
+              <a:t>a-sphere-mars-rotates.html</a:t>
+            </a:r>
+          </a:p>
+        </p:txBody>
+      </p:sp>
     </p:spTree>
     <p:extLst>
       <p:ext uri="{BB962C8B-B14F-4D97-AF65-F5344CB8AC3E}">
@@ -7985,6 +8036,177 @@
 </file>
 
 <file path=ppt/slides/slide16.xml><?xml version="1.0" encoding="utf-8"?>
+<p:sld xmlns:a="http://schemas.openxmlformats.org/drawingml/2006/main" xmlns:r="http://schemas.openxmlformats.org/officeDocument/2006/relationships" xmlns:p="http://schemas.openxmlformats.org/presentationml/2006/main">
+  <p:cSld>
+    <p:spTree>
+      <p:nvGrpSpPr>
+        <p:cNvPr id="1" name=""/>
+        <p:cNvGrpSpPr/>
+        <p:nvPr/>
+      </p:nvGrpSpPr>
+      <p:grpSpPr>
+        <a:xfrm>
+          <a:off x="0" y="0"/>
+          <a:ext cx="0" cy="0"/>
+          <a:chOff x="0" y="0"/>
+          <a:chExt cx="0" cy="0"/>
+        </a:xfrm>
+      </p:grpSpPr>
+      <p:sp>
+        <p:nvSpPr>
+          <p:cNvPr id="2" name="Title 1">
+            <a:extLst>
+              <a:ext uri="{FF2B5EF4-FFF2-40B4-BE49-F238E27FC236}">
+                <a16:creationId xmlns:a16="http://schemas.microsoft.com/office/drawing/2014/main" id="{DE2C3538-B5E7-0AC3-9195-4B860FE9663C}"/>
+              </a:ext>
+            </a:extLst>
+          </p:cNvPr>
+          <p:cNvSpPr>
+            <a:spLocks noGrp="1"/>
+          </p:cNvSpPr>
+          <p:nvPr>
+            <p:ph type="title"/>
+          </p:nvPr>
+        </p:nvSpPr>
+        <p:spPr/>
+        <p:txBody>
+          <a:bodyPr/>
+          <a:lstStyle/>
+          <a:p>
+            <a:r>
+              <a:rPr lang="en-US" dirty="0"/>
+              <a:t>Colors a-box-change-colors.html</a:t>
+            </a:r>
+          </a:p>
+        </p:txBody>
+      </p:sp>
+      <p:sp>
+        <p:nvSpPr>
+          <p:cNvPr id="3" name="Content Placeholder 2">
+            <a:extLst>
+              <a:ext uri="{FF2B5EF4-FFF2-40B4-BE49-F238E27FC236}">
+                <a16:creationId xmlns:a16="http://schemas.microsoft.com/office/drawing/2014/main" id="{3427FE35-6904-765A-9C9D-CB88E07E5597}"/>
+              </a:ext>
+            </a:extLst>
+          </p:cNvPr>
+          <p:cNvSpPr>
+            <a:spLocks noGrp="1"/>
+          </p:cNvSpPr>
+          <p:nvPr>
+            <p:ph idx="1"/>
+          </p:nvPr>
+        </p:nvSpPr>
+        <p:spPr/>
+        <p:txBody>
+          <a:bodyPr>
+            <a:normAutofit/>
+          </a:bodyPr>
+          <a:lstStyle/>
+          <a:p>
+            <a:pPr marL="0" indent="0">
+              <a:buNone/>
+            </a:pPr>
+            <a:endParaRPr lang="en-US" dirty="0"/>
+          </a:p>
+          <a:p>
+            <a:pPr marL="0" indent="0">
+              <a:buNone/>
+            </a:pPr>
+            <a:r>
+              <a:rPr lang="en-US" dirty="0"/>
+              <a:t>&lt;a-box  id="My box" </a:t>
+            </a:r>
+          </a:p>
+          <a:p>
+            <a:pPr marL="0" indent="0">
+              <a:buNone/>
+            </a:pPr>
+            <a:r>
+              <a:rPr lang="en-US" dirty="0"/>
+              <a:t>	position="0 2 -5" </a:t>
+            </a:r>
+          </a:p>
+          <a:p>
+            <a:pPr marL="0" indent="0">
+              <a:buNone/>
+            </a:pPr>
+            <a:r>
+              <a:rPr lang="en-US" dirty="0"/>
+              <a:t>	rotation="45 45 45" </a:t>
+            </a:r>
+          </a:p>
+          <a:p>
+            <a:pPr marL="0" indent="0">
+              <a:buNone/>
+            </a:pPr>
+            <a:r>
+              <a:rPr lang="en-US" dirty="0"/>
+              <a:t>	animation='property: </a:t>
+            </a:r>
+            <a:r>
+              <a:rPr lang="en-US" dirty="0">
+                <a:solidFill>
+                  <a:srgbClr val="FF0000"/>
+                </a:solidFill>
+              </a:rPr>
+              <a:t>color</a:t>
+            </a:r>
+            <a:r>
+              <a:rPr lang="en-US" dirty="0"/>
+              <a:t>; from: #FFFFFF; to: #FF0000; </a:t>
+            </a:r>
+          </a:p>
+          <a:p>
+            <a:pPr marL="0" indent="0">
+              <a:buNone/>
+            </a:pPr>
+            <a:r>
+              <a:rPr lang="en-US" dirty="0"/>
+              <a:t>	dur: 5000; </a:t>
+            </a:r>
+            <a:r>
+              <a:rPr lang="en-US" dirty="0" err="1"/>
+              <a:t>dir</a:t>
+            </a:r>
+            <a:r>
+              <a:rPr lang="en-US" dirty="0"/>
+              <a:t>: normal; easing: linear; </a:t>
+            </a:r>
+          </a:p>
+          <a:p>
+            <a:pPr marL="0" indent="0">
+              <a:buNone/>
+            </a:pPr>
+            <a:r>
+              <a:rPr lang="en-US" dirty="0"/>
+              <a:t>	loop: true;'</a:t>
+            </a:r>
+          </a:p>
+          <a:p>
+            <a:pPr marL="0" indent="0">
+              <a:buNone/>
+            </a:pPr>
+            <a:r>
+              <a:rPr lang="en-US" dirty="0"/>
+              <a:t>	  &gt;&lt;/a-box&gt;</a:t>
+            </a:r>
+          </a:p>
+        </p:txBody>
+      </p:sp>
+    </p:spTree>
+    <p:extLst>
+      <p:ext uri="{BB962C8B-B14F-4D97-AF65-F5344CB8AC3E}">
+        <p14:creationId xmlns:p14="http://schemas.microsoft.com/office/powerpoint/2010/main" val="175025549"/>
+      </p:ext>
+    </p:extLst>
+  </p:cSld>
+  <p:clrMapOvr>
+    <a:masterClrMapping/>
+  </p:clrMapOvr>
+</p:sld>
+</file>
+
+<file path=ppt/slides/slide17.xml><?xml version="1.0" encoding="utf-8"?>
 <p:sld xmlns:a="http://schemas.openxmlformats.org/drawingml/2006/main" xmlns:r="http://schemas.openxmlformats.org/officeDocument/2006/relationships" xmlns:p="http://schemas.openxmlformats.org/presentationml/2006/main">
   <p:cSld>
     <p:spTree>
@@ -8157,7 +8379,7 @@
 </p:sld>
 </file>
 
-<file path=ppt/slides/slide17.xml><?xml version="1.0" encoding="utf-8"?>
+<file path=ppt/slides/slide18.xml><?xml version="1.0" encoding="utf-8"?>
 <p:sld xmlns:a="http://schemas.openxmlformats.org/drawingml/2006/main" xmlns:r="http://schemas.openxmlformats.org/officeDocument/2006/relationships" xmlns:p="http://schemas.openxmlformats.org/presentationml/2006/main">
   <p:cSld>
     <p:spTree>
@@ -8321,7 +8543,7 @@
 </p:sld>
 </file>
 
-<file path=ppt/slides/slide18.xml><?xml version="1.0" encoding="utf-8"?>
+<file path=ppt/slides/slide19.xml><?xml version="1.0" encoding="utf-8"?>
 <p:sld xmlns:a="http://schemas.openxmlformats.org/drawingml/2006/main" xmlns:r="http://schemas.openxmlformats.org/officeDocument/2006/relationships" xmlns:p="http://schemas.openxmlformats.org/presentationml/2006/main">
   <p:cSld>
     <p:spTree>
@@ -8398,19 +8620,15 @@
             <a:pPr marL="0" indent="0">
               <a:buNone/>
             </a:pPr>
-            <a:endParaRPr lang="en-US" sz="1600"/>
+            <a:endParaRPr lang="en-US" sz="1600" dirty="0"/>
           </a:p>
           <a:p>
             <a:pPr marL="0" indent="0">
               <a:buNone/>
             </a:pPr>
             <a:r>
-              <a:rPr lang="en-US" sz="1600"/>
-              <a:t>&lt;</a:t>
-            </a:r>
-            <a:r>
               <a:rPr lang="en-US" sz="1600" dirty="0"/>
-              <a:t>a-sphere </a:t>
+              <a:t>&lt;a-sphere </a:t>
             </a:r>
             <a:r>
               <a:rPr lang="en-US" sz="1600" dirty="0" err="1"/>
@@ -8571,6 +8789,35 @@
             <a:r>
               <a:rPr lang="en-US" sz="1600" dirty="0"/>
               <a:t>&lt;/a-sphere&gt;</a:t>
+            </a:r>
+          </a:p>
+          <a:p>
+            <a:pPr marL="0" indent="0">
+              <a:buNone/>
+            </a:pPr>
+            <a:endParaRPr lang="en-US" sz="1600" dirty="0"/>
+          </a:p>
+          <a:p>
+            <a:pPr marL="0" indent="0">
+              <a:buNone/>
+            </a:pPr>
+            <a:endParaRPr lang="en-US" sz="1600" dirty="0"/>
+          </a:p>
+          <a:p>
+            <a:pPr marL="0" indent="0">
+              <a:buNone/>
+            </a:pPr>
+            <a:r>
+              <a:rPr lang="en-US" sz="2400" dirty="0"/>
+              <a:t>A</a:t>
+            </a:r>
+            <a:r>
+              <a:rPr lang="en-US" sz="2400"/>
+              <a:t>nimations </a:t>
+            </a:r>
+            <a:r>
+              <a:rPr lang="en-US" sz="2400" dirty="0"/>
+              <a:t>can change any property with a numeric / vector / color value</a:t>
             </a:r>
           </a:p>
         </p:txBody>
@@ -8588,7 +8835,186 @@
 </p:sld>
 </file>
 
-<file path=ppt/slides/slide19.xml><?xml version="1.0" encoding="utf-8"?>
+<file path=ppt/slides/slide2.xml><?xml version="1.0" encoding="utf-8"?>
+<p:sld xmlns:a="http://schemas.openxmlformats.org/drawingml/2006/main" xmlns:r="http://schemas.openxmlformats.org/officeDocument/2006/relationships" xmlns:p="http://schemas.openxmlformats.org/presentationml/2006/main">
+  <p:cSld>
+    <p:spTree>
+      <p:nvGrpSpPr>
+        <p:cNvPr id="1" name=""/>
+        <p:cNvGrpSpPr/>
+        <p:nvPr/>
+      </p:nvGrpSpPr>
+      <p:grpSpPr>
+        <a:xfrm>
+          <a:off x="0" y="0"/>
+          <a:ext cx="0" cy="0"/>
+          <a:chOff x="0" y="0"/>
+          <a:chExt cx="0" cy="0"/>
+        </a:xfrm>
+      </p:grpSpPr>
+      <p:sp>
+        <p:nvSpPr>
+          <p:cNvPr id="2" name="Title 1">
+            <a:extLst>
+              <a:ext uri="{FF2B5EF4-FFF2-40B4-BE49-F238E27FC236}">
+                <a16:creationId xmlns:a16="http://schemas.microsoft.com/office/drawing/2014/main" id="{D0A32E1B-304C-70CA-4FE2-121036B45BBD}"/>
+              </a:ext>
+            </a:extLst>
+          </p:cNvPr>
+          <p:cNvSpPr>
+            <a:spLocks noGrp="1"/>
+          </p:cNvSpPr>
+          <p:nvPr>
+            <p:ph type="title"/>
+          </p:nvPr>
+        </p:nvSpPr>
+        <p:spPr/>
+        <p:txBody>
+          <a:bodyPr/>
+          <a:lstStyle/>
+          <a:p>
+            <a:r>
+              <a:rPr lang="en-US" dirty="0">
+                <a:solidFill>
+                  <a:srgbClr val="0070C0"/>
+                </a:solidFill>
+                <a:ea typeface="Calibri Light"/>
+                <a:cs typeface="Calibri Light"/>
+              </a:rPr>
+              <a:t>Outline</a:t>
+            </a:r>
+            <a:endParaRPr lang="en-US">
+              <a:solidFill>
+                <a:srgbClr val="0070C0"/>
+              </a:solidFill>
+              <a:ea typeface="Calibri Light"/>
+              <a:cs typeface="Calibri Light"/>
+            </a:endParaRPr>
+          </a:p>
+        </p:txBody>
+      </p:sp>
+      <p:sp>
+        <p:nvSpPr>
+          <p:cNvPr id="3" name="Content Placeholder 2">
+            <a:extLst>
+              <a:ext uri="{FF2B5EF4-FFF2-40B4-BE49-F238E27FC236}">
+                <a16:creationId xmlns:a16="http://schemas.microsoft.com/office/drawing/2014/main" id="{0F80D594-86CE-1ED4-994C-042A2971ED94}"/>
+              </a:ext>
+            </a:extLst>
+          </p:cNvPr>
+          <p:cNvSpPr>
+            <a:spLocks noGrp="1"/>
+          </p:cNvSpPr>
+          <p:nvPr>
+            <p:ph idx="1"/>
+          </p:nvPr>
+        </p:nvSpPr>
+        <p:spPr/>
+        <p:txBody>
+          <a:bodyPr vert="horz" lIns="91440" tIns="45720" rIns="91440" bIns="45720" rtlCol="0" anchor="t">
+            <a:normAutofit/>
+          </a:bodyPr>
+          <a:lstStyle/>
+          <a:p>
+            <a:pPr marL="0" indent="0">
+              <a:buNone/>
+            </a:pPr>
+            <a:endParaRPr lang="en-US" dirty="0">
+              <a:ea typeface="Calibri" panose="020F0502020204030204"/>
+              <a:cs typeface="Calibri" panose="020F0502020204030204"/>
+            </a:endParaRPr>
+          </a:p>
+          <a:p>
+            <a:pPr marL="0" indent="0">
+              <a:buNone/>
+            </a:pPr>
+            <a:r>
+              <a:rPr lang="en-US" dirty="0">
+                <a:ea typeface="Calibri" panose="020F0502020204030204"/>
+                <a:cs typeface="Calibri" panose="020F0502020204030204"/>
+              </a:rPr>
+              <a:t>Translation</a:t>
+            </a:r>
+          </a:p>
+          <a:p>
+            <a:pPr marL="0" indent="0">
+              <a:buNone/>
+            </a:pPr>
+            <a:endParaRPr lang="en-US" dirty="0">
+              <a:ea typeface="Calibri" panose="020F0502020204030204"/>
+              <a:cs typeface="Calibri" panose="020F0502020204030204"/>
+            </a:endParaRPr>
+          </a:p>
+          <a:p>
+            <a:pPr marL="0" indent="0">
+              <a:buNone/>
+            </a:pPr>
+            <a:r>
+              <a:rPr lang="en-US" dirty="0">
+                <a:ea typeface="Calibri" panose="020F0502020204030204"/>
+                <a:cs typeface="Calibri" panose="020F0502020204030204"/>
+              </a:rPr>
+              <a:t>Spinning </a:t>
+            </a:r>
+          </a:p>
+          <a:p>
+            <a:pPr marL="0" indent="0">
+              <a:buNone/>
+            </a:pPr>
+            <a:endParaRPr lang="en-US" dirty="0">
+              <a:ea typeface="Calibri" panose="020F0502020204030204"/>
+              <a:cs typeface="Calibri" panose="020F0502020204030204"/>
+            </a:endParaRPr>
+          </a:p>
+          <a:p>
+            <a:pPr marL="0" indent="0">
+              <a:buNone/>
+            </a:pPr>
+            <a:r>
+              <a:rPr lang="en-US" dirty="0">
+                <a:ea typeface="Calibri" panose="020F0502020204030204"/>
+                <a:cs typeface="Calibri" panose="020F0502020204030204"/>
+              </a:rPr>
+              <a:t>Rotation</a:t>
+            </a:r>
+          </a:p>
+          <a:p>
+            <a:pPr marL="0" indent="0">
+              <a:buNone/>
+            </a:pPr>
+            <a:endParaRPr lang="en-US" dirty="0">
+              <a:ea typeface="Calibri" panose="020F0502020204030204"/>
+              <a:cs typeface="Calibri" panose="020F0502020204030204"/>
+            </a:endParaRPr>
+          </a:p>
+          <a:p>
+            <a:pPr marL="0" indent="0">
+              <a:buNone/>
+            </a:pPr>
+            <a:r>
+              <a:rPr lang="en-US" dirty="0">
+                <a:ea typeface="Calibri" panose="020F0502020204030204"/>
+                <a:cs typeface="Calibri" panose="020F0502020204030204"/>
+              </a:rPr>
+              <a:t>Linear movement</a:t>
+            </a:r>
+          </a:p>
+        </p:txBody>
+      </p:sp>
+    </p:spTree>
+    <p:extLst>
+      <p:ext uri="{BB962C8B-B14F-4D97-AF65-F5344CB8AC3E}">
+        <p14:creationId xmlns:p14="http://schemas.microsoft.com/office/powerpoint/2010/main" val="1169712265"/>
+      </p:ext>
+    </p:extLst>
+  </p:cSld>
+  <p:clrMapOvr>
+    <a:masterClrMapping/>
+  </p:clrMapOvr>
+</p:sld>
+</file>
+
+<file path=ppt/slides/slide20.xml><?xml version="1.0" encoding="utf-8"?>
 <p:sld xmlns:a="http://schemas.openxmlformats.org/drawingml/2006/main" xmlns:r="http://schemas.openxmlformats.org/officeDocument/2006/relationships" xmlns:p="http://schemas.openxmlformats.org/presentationml/2006/main">
   <p:cSld>
     <p:spTree>
@@ -8638,185 +9064,6 @@
     <p:extLst>
       <p:ext uri="{BB962C8B-B14F-4D97-AF65-F5344CB8AC3E}">
         <p14:creationId xmlns:p14="http://schemas.microsoft.com/office/powerpoint/2010/main" val="1758179659"/>
-      </p:ext>
-    </p:extLst>
-  </p:cSld>
-  <p:clrMapOvr>
-    <a:masterClrMapping/>
-  </p:clrMapOvr>
-</p:sld>
-</file>
-
-<file path=ppt/slides/slide2.xml><?xml version="1.0" encoding="utf-8"?>
-<p:sld xmlns:a="http://schemas.openxmlformats.org/drawingml/2006/main" xmlns:r="http://schemas.openxmlformats.org/officeDocument/2006/relationships" xmlns:p="http://schemas.openxmlformats.org/presentationml/2006/main">
-  <p:cSld>
-    <p:spTree>
-      <p:nvGrpSpPr>
-        <p:cNvPr id="1" name=""/>
-        <p:cNvGrpSpPr/>
-        <p:nvPr/>
-      </p:nvGrpSpPr>
-      <p:grpSpPr>
-        <a:xfrm>
-          <a:off x="0" y="0"/>
-          <a:ext cx="0" cy="0"/>
-          <a:chOff x="0" y="0"/>
-          <a:chExt cx="0" cy="0"/>
-        </a:xfrm>
-      </p:grpSpPr>
-      <p:sp>
-        <p:nvSpPr>
-          <p:cNvPr id="2" name="Title 1">
-            <a:extLst>
-              <a:ext uri="{FF2B5EF4-FFF2-40B4-BE49-F238E27FC236}">
-                <a16:creationId xmlns:a16="http://schemas.microsoft.com/office/drawing/2014/main" id="{D0A32E1B-304C-70CA-4FE2-121036B45BBD}"/>
-              </a:ext>
-            </a:extLst>
-          </p:cNvPr>
-          <p:cNvSpPr>
-            <a:spLocks noGrp="1"/>
-          </p:cNvSpPr>
-          <p:nvPr>
-            <p:ph type="title"/>
-          </p:nvPr>
-        </p:nvSpPr>
-        <p:spPr/>
-        <p:txBody>
-          <a:bodyPr/>
-          <a:lstStyle/>
-          <a:p>
-            <a:r>
-              <a:rPr lang="en-US" dirty="0">
-                <a:solidFill>
-                  <a:srgbClr val="0070C0"/>
-                </a:solidFill>
-                <a:ea typeface="Calibri Light"/>
-                <a:cs typeface="Calibri Light"/>
-              </a:rPr>
-              <a:t>Outline</a:t>
-            </a:r>
-            <a:endParaRPr lang="en-US">
-              <a:solidFill>
-                <a:srgbClr val="0070C0"/>
-              </a:solidFill>
-              <a:ea typeface="Calibri Light"/>
-              <a:cs typeface="Calibri Light"/>
-            </a:endParaRPr>
-          </a:p>
-        </p:txBody>
-      </p:sp>
-      <p:sp>
-        <p:nvSpPr>
-          <p:cNvPr id="3" name="Content Placeholder 2">
-            <a:extLst>
-              <a:ext uri="{FF2B5EF4-FFF2-40B4-BE49-F238E27FC236}">
-                <a16:creationId xmlns:a16="http://schemas.microsoft.com/office/drawing/2014/main" id="{0F80D594-86CE-1ED4-994C-042A2971ED94}"/>
-              </a:ext>
-            </a:extLst>
-          </p:cNvPr>
-          <p:cNvSpPr>
-            <a:spLocks noGrp="1"/>
-          </p:cNvSpPr>
-          <p:nvPr>
-            <p:ph idx="1"/>
-          </p:nvPr>
-        </p:nvSpPr>
-        <p:spPr/>
-        <p:txBody>
-          <a:bodyPr vert="horz" lIns="91440" tIns="45720" rIns="91440" bIns="45720" rtlCol="0" anchor="t">
-            <a:normAutofit/>
-          </a:bodyPr>
-          <a:lstStyle/>
-          <a:p>
-            <a:pPr marL="0" indent="0">
-              <a:buNone/>
-            </a:pPr>
-            <a:endParaRPr lang="en-US" dirty="0">
-              <a:ea typeface="Calibri" panose="020F0502020204030204"/>
-              <a:cs typeface="Calibri" panose="020F0502020204030204"/>
-            </a:endParaRPr>
-          </a:p>
-          <a:p>
-            <a:pPr marL="0" indent="0">
-              <a:buNone/>
-            </a:pPr>
-            <a:r>
-              <a:rPr lang="en-US" dirty="0">
-                <a:ea typeface="Calibri" panose="020F0502020204030204"/>
-                <a:cs typeface="Calibri" panose="020F0502020204030204"/>
-              </a:rPr>
-              <a:t>Translation</a:t>
-            </a:r>
-          </a:p>
-          <a:p>
-            <a:pPr marL="0" indent="0">
-              <a:buNone/>
-            </a:pPr>
-            <a:endParaRPr lang="en-US" dirty="0">
-              <a:ea typeface="Calibri" panose="020F0502020204030204"/>
-              <a:cs typeface="Calibri" panose="020F0502020204030204"/>
-            </a:endParaRPr>
-          </a:p>
-          <a:p>
-            <a:pPr marL="0" indent="0">
-              <a:buNone/>
-            </a:pPr>
-            <a:r>
-              <a:rPr lang="en-US" dirty="0">
-                <a:ea typeface="Calibri" panose="020F0502020204030204"/>
-                <a:cs typeface="Calibri" panose="020F0502020204030204"/>
-              </a:rPr>
-              <a:t>Spinning </a:t>
-            </a:r>
-          </a:p>
-          <a:p>
-            <a:pPr marL="0" indent="0">
-              <a:buNone/>
-            </a:pPr>
-            <a:endParaRPr lang="en-US" dirty="0">
-              <a:ea typeface="Calibri" panose="020F0502020204030204"/>
-              <a:cs typeface="Calibri" panose="020F0502020204030204"/>
-            </a:endParaRPr>
-          </a:p>
-          <a:p>
-            <a:pPr marL="0" indent="0">
-              <a:buNone/>
-            </a:pPr>
-            <a:r>
-              <a:rPr lang="en-US" dirty="0">
-                <a:ea typeface="Calibri" panose="020F0502020204030204"/>
-                <a:cs typeface="Calibri" panose="020F0502020204030204"/>
-              </a:rPr>
-              <a:t>Rotation</a:t>
-            </a:r>
-          </a:p>
-          <a:p>
-            <a:pPr marL="0" indent="0">
-              <a:buNone/>
-            </a:pPr>
-            <a:endParaRPr lang="en-US" dirty="0">
-              <a:ea typeface="Calibri" panose="020F0502020204030204"/>
-              <a:cs typeface="Calibri" panose="020F0502020204030204"/>
-            </a:endParaRPr>
-          </a:p>
-          <a:p>
-            <a:pPr marL="0" indent="0">
-              <a:buNone/>
-            </a:pPr>
-            <a:r>
-              <a:rPr lang="en-US" dirty="0">
-                <a:ea typeface="Calibri" panose="020F0502020204030204"/>
-                <a:cs typeface="Calibri" panose="020F0502020204030204"/>
-              </a:rPr>
-              <a:t>Linear movement</a:t>
-            </a:r>
-          </a:p>
-        </p:txBody>
-      </p:sp>
-    </p:spTree>
-    <p:extLst>
-      <p:ext uri="{BB962C8B-B14F-4D97-AF65-F5344CB8AC3E}">
-        <p14:creationId xmlns:p14="http://schemas.microsoft.com/office/powerpoint/2010/main" val="1169712265"/>
       </p:ext>
     </p:extLst>
   </p:cSld>
